--- a/plugin/tests/fixtures/pptx/ecosystem_bc/templates/dependency-heavy.pptx
+++ b/plugin/tests/fixtures/pptx/ecosystem_bc/templates/dependency-heavy.pptx
@@ -1767,4 +1767,132 @@
     </a:fmtScheme>
   </a:themeElements>
 </a:theme>
+</file>
+
+<file path=ppt/theme/theme2.xml><?xml version="1.0" encoding="utf-8"?>
+<a:theme xmlns:a="http://schemas.openxmlformats.org/drawingml/2006/main" name="Elftia Office">
+  <a:themeElements>
+    <a:clrScheme name="Elftia Office">
+      <a:dk1>
+        <a:sysClr val="windowText" lastClr="000000"/>
+      </a:dk1>
+      <a:lt1>
+        <a:sysClr val="window" lastClr="FFFFFF"/>
+      </a:lt1>
+      <a:dk2>
+        <a:srgbClr val="44546A"/>
+      </a:dk2>
+      <a:lt2>
+        <a:srgbClr val="E7E6E6"/>
+      </a:lt2>
+      <a:accent1>
+        <a:srgbClr val="4472C4"/>
+      </a:accent1>
+      <a:accent2>
+        <a:srgbClr val="ED7D31"/>
+      </a:accent2>
+      <a:accent3>
+        <a:srgbClr val="A5A5A5"/>
+      </a:accent3>
+      <a:accent4>
+        <a:srgbClr val="FFC000"/>
+      </a:accent4>
+      <a:accent5>
+        <a:srgbClr val="5B9BD5"/>
+      </a:accent5>
+      <a:accent6>
+        <a:srgbClr val="70AD47"/>
+      </a:accent6>
+      <a:hlink>
+        <a:srgbClr val="0563C1"/>
+      </a:hlink>
+      <a:folHlink>
+        <a:srgbClr val="954F72"/>
+      </a:folHlink>
+    </a:clrScheme>
+    <a:fontScheme name="Elftia Office">
+      <a:majorFont>
+        <a:latin typeface="Calibri Light"/>
+        <a:ea typeface=""/>
+        <a:cs typeface=""/>
+      </a:majorFont>
+      <a:minorFont>
+        <a:latin typeface="Calibri"/>
+        <a:ea typeface=""/>
+        <a:cs typeface=""/>
+      </a:minorFont>
+    </a:fontScheme>
+    <a:fmtScheme>
+      <a:fillStyleLst>
+        <a:solidFill>
+          <a:schemeClr val="phClr"/>
+        </a:solidFill>
+        <a:gradFill>
+          <a:gsLst>
+            <a:gs pos="0">
+              <a:schemeClr val="phClr"/>
+            </a:gs>
+            <a:gs pos="100000">
+              <a:schemeClr val="phClr"/>
+            </a:gs>
+          </a:gsLst>
+          <a:lin ang="0" scaled="0"/>
+        </a:gradFill>
+        <a:gradFill>
+          <a:gsLst>
+            <a:gs pos="0">
+              <a:schemeClr val="phClr"/>
+            </a:gs>
+            <a:gs pos="100000">
+              <a:schemeClr val="phClr"/>
+            </a:gs>
+          </a:gsLst>
+          <a:lin ang="0" scaled="0"/>
+        </a:gradFill>
+      </a:fillStyleLst>
+      <a:lnStyleLst>
+        <a:ln w="9100" cap="flat" cmpd="sng" algn="ctr">
+          <a:solidFill>
+            <a:schemeClr val="phClr"/>
+          </a:solidFill>
+          <a:prstDash val="solid"/>
+        </a:ln>
+        <a:ln w="9100" cap="flat" cmpd="sng" algn="ctr">
+          <a:solidFill>
+            <a:schemeClr val="phClr"/>
+          </a:solidFill>
+          <a:prstDash val="solid"/>
+        </a:ln>
+        <a:ln w="9100" cap="flat" cmpd="sng" algn="ctr">
+          <a:solidFill>
+            <a:schemeClr val="phClr"/>
+          </a:solidFill>
+          <a:prstDash val="solid"/>
+        </a:ln>
+      </a:lnStyleLst>
+      <a:effectStyleLst>
+        <a:effectStyle>
+          <a:effectLst/>
+        </a:effectStyle>
+        <a:effectStyle>
+          <a:effectLst/>
+        </a:effectStyle>
+        <a:effectStyle>
+          <a:effectLst/>
+        </a:effectStyle>
+      </a:effectStyleLst>
+      <a:bgFillStyleLst>
+        <a:solidFill>
+          <a:schemeClr val="phClr"/>
+        </a:solidFill>
+        <a:solidFill>
+          <a:schemeClr val="phClr"/>
+        </a:solidFill>
+        <a:solidFill>
+          <a:schemeClr val="phClr"/>
+        </a:solidFill>
+      </a:bgFillStyleLst>
+    </a:fmtScheme>
+  </a:themeElements>
+</a:theme>
 </file>